--- a/dist/weeks-2학기/서비스디자인_2학기_01주차_학기시작과개인발표.pptx
+++ b/dist/weeks-2학기/서비스디자인_2학기_01주차_학기시작과개인발표.pptx
@@ -516,7 +516,13 @@
           <a:p>
             <a:r>
               <a:rPr lang="en-US" dirty="0"/>
-              <a:t>1학기 산출물의 완성도 편차가 크다. 오늘은 그 편차를 드러내되 평가하지 않는 자리로 만든다. 발표의 목적은 '내가 무엇을 가지고 2학기를 시작하는가'를 본인과 동료가 함께 확인하는 것이다. 부족한 학생에게는 2주차까지 보완 범위를 개별로 정해 준다.</a:t>
+              <a:t>[말할 내용]
+2학기 서비스디자인 첫 시간입니다.
+1학기에 여러분은 리서치를 하고, 화면을 기획하고, 컨셉을 정의하는 데까지 왔습니다. 이번 학기는 그걸 눈에 보이는 결과로 만드는 학기입니다.
+최종 목적지는 졸업 전시회에 걸 패널 한 장이고, 정확히 말하면 출력소에 넘길 수 있는 인쇄 데이터까지가 이 학기의 과정입니다.
+오늘은 여러분 각자가 1학기에 뭘 가지고 왔는지 서로 확인하는 자리입니다. 평가하는 자리가 아니니 편하게 시작하시면 됩니다.
+[운영 메모]
+1학기 산출물의 완성도 편차가 크다. 오늘은 그 편차를 드러내되 평가하지 않는 자리로 만든다. 발표의 목적은 '내가 무엇을 가지고 2학기를 시작하는가'를 본인과 동료가 함께 확인하는 것이다. 부족한 학생에게는 2주차까지 보완 범위를 개별로 정해 준다.</a:t>
             </a:r>
             <a:endParaRPr lang="en-US" dirty="0"/>
           </a:p>
@@ -604,7 +610,16 @@
           <a:p>
             <a:r>
               <a:rPr lang="en-US" dirty="0"/>
-              <a:t>이 표가 2학기 커리큘럼의 근거다. 학생이 '왜 이런 순서로 배우는지' 납득하게 만드는 슬라이드.</a:t>
+              <a:t>[말할 내용]
+발표를 들으면서 공통으로 보인 것들입니다. 대부분의 프로젝트가 같은 자리에서 걸려 있습니다.
+하나, 화면마다 규격이 다릅니다. 같은 하단 바인데 높이가 화면마다 다르고 아이콘 크기도 제각각입니다.
+둘, 같은 요소를 여러 번 그렸습니다. 복사해서 붙여넣기로 만들어서, 하나 고치면 나머지를 다 찾아 고쳐야 합니다.
+셋, 색과 글자 크기가 그때그때 정해졌습니다. 규칙이 없어서 화면을 나란히 놓으면 다른 서비스처럼 보입니다.
+넷, 정상 화면만 있습니다. 데이터가 없을 때나 오류가 났을 때의 화면이 없어요.
+다섯, 패널을 염두에 둔 이미지가 없습니다. 화면 캡처는 있는데 3미터 밖에서 읽히는 큰 장면이 없습니다.
+오른쪽에 몇 주차에 푸는지 적어 놨습니다. 1번과 2번은 다음 주에 함께 풉니다. 이 둘만 풀려도 작업 속도가 눈에 띄게 달라집니다.
+[운영 메모]
+이 표가 2학기 커리큘럼의 근거다. 학생이 '왜 이런 순서로 배우는지' 납득하게 만드는 슬라이드.</a:t>
             </a:r>
             <a:endParaRPr lang="en-US" dirty="0"/>
           </a:p>
@@ -692,7 +707,11 @@
           <a:p>
             <a:r>
               <a:rPr lang="en-US" dirty="0"/>
-              <a:t>20분 구간. 마감 세 개를 칠판에 적어 두고 학기 내내 지우지 말 것.</a:t>
+              <a:t>[말할 내용]
+마지막으로 학기 운영입니다.
+언제 뭐가 잠기는지 먼저 알고 시작하셔야 합니다.
+[운영 메모]
+20분 구간. 마감 세 개를 칠판에 적어 두고 학기 내내 지우지 말 것.</a:t>
             </a:r>
             <a:endParaRPr lang="en-US" dirty="0"/>
           </a:p>
@@ -780,7 +799,14 @@
           <a:p>
             <a:r>
               <a:rPr lang="en-US" dirty="0"/>
-              <a:t>세 번째의 마지막 문장을 14주차에 다시 말한다. 완벽주의로 제출을 미루는 학생이 매년 전시에 못 건다.</a:t>
+              <a:t>[말할 내용]
+조정이 불가능한 시점이 세 번 있습니다.
+첫째, 2주차 작업 범위 확정. 만들 화면 목록이 여기서 잠깁니다. 이후에 화면을 늘리면 패널 마감을 못 맞춥니다. 줄이는 건 언제든 됩니다.
+둘째, 11주차 화면 완성. 패널에 실릴 이미지가 이때 다 있어야 합니다. 12주차부터는 레이아웃 작업이라 화면 고칠 시간이 없습니다.
+셋째, 14주차 인쇄 데이터 마감. 이건 출력 발주와 전시 설치 일정에 직결됩니다. 한 사람이 늦으면 학과 전시 전체가 밀립니다. 예외 없습니다.
+세 시점 다 공통으로 — 완성도가 100%가 아니어도 반드시 제출하세요. 미완성 제출이 미제출보다 낫습니다.
+[운영 메모]
+세 번째의 마지막 문장을 14주차에 다시 말한다. 완벽주의로 제출을 미루는 학생이 매년 전시에 못 건다.</a:t>
             </a:r>
             <a:endParaRPr lang="en-US" dirty="0"/>
           </a:p>
@@ -868,7 +894,14 @@
           <a:p>
             <a:r>
               <a:rPr lang="en-US" dirty="0"/>
-              <a:t>배점 숫자를 임의로 넣지 않았다. 학과 기준을 받으면 이 슬라이드와 각 주차 체크리스트를 함께 수정할 것.</a:t>
+              <a:t>[말할 내용]
+평가는 세 축입니다.
+과정은 매주 쌓입니다. 출석과 크리틱 참여, 주차별 제출물이요. 마지막에 몰아서 만들 수 없는 구조입니다.
+중간 검증은 학기 중반에 디자인 시스템의 일관성과 화면 완성도를 봅니다. 방향을 조정할 수 있는 시점이기도 합니다.
+결과물은 전시 패널입니다. 배점이 가장 큽니다.
+구체적인 비율은 학과 기준이 확정되면 공지하겠습니다. 오늘은 이 세 축이 평가된다는 것만 기억하세요.
+[운영 메모]
+배점 숫자를 임의로 넣지 않았다. 학과 기준을 받으면 이 슬라이드와 각 주차 체크리스트를 함께 수정할 것.</a:t>
             </a:r>
             <a:endParaRPr lang="en-US" dirty="0"/>
           </a:p>
@@ -956,7 +989,15 @@
           <a:p>
             <a:r>
               <a:rPr lang="en-US" dirty="0"/>
-              <a:t>마지막 문장이 중요하다. 눈대중으로 적어 오면 다음 주에 '문제가 없다'고 생각하게 된다.</a:t>
+              <a:t>[말할 내용]
+오늘 제출 세 가지, 다음 주까지 과제 세 가지입니다.
+오늘 것은 발표, 듣는 사람 기록지, 그리고 패널 스토리라인 A4 한 장입니다.
+과제는 작업 범위 확정서, 화면 실측표, Figma 파일 정리입니다.
+여기서 6번 7번을 꼭 보세요. 화면 실측표 — 기준 폭, GNB 높이, 아이콘, 라벨 크기를 실제로 재서 적어 오시는 겁니다.
+눈대중으로 적지 마세요. Figma에서 값을 클릭해서 확인하고 적으셔야 합니다.
+그리고 화면마다 값이 다른 곳을 정리하지 말고 다른 그대로 적어 오세요. 정리해서 오시면 문제가 안 보입니다. 이게 다음 주 수업의 재료입니다.
+[운영 메모]
+마지막 문장이 중요하다. 눈대중으로 적어 오면 다음 주에 '문제가 없다'고 생각하게 된다.</a:t>
             </a:r>
             <a:endParaRPr lang="en-US" dirty="0"/>
           </a:p>
@@ -1044,7 +1085,14 @@
           <a:p>
             <a:r>
               <a:rPr lang="en-US" dirty="0"/>
-              <a:t>실측표가 2주차 수업의 재료다. 재보지 않고 오면 실습을 시작할 수 없다. '다른 그대로 적어 오라'는 말을 강조할 것 — 정리해서 오면 문제가 안 보인다.</a:t>
+              <a:t>[말할 내용]
+정리하겠습니다.
+과제는 세 가지입니다. 작업 범위 확정서 한 장, 화면 실측표, Figma 파일 정리. 2주차 수업 시작 전까지 올려 주세요.
+다음 주에는 하단 GNB를 다룹니다. 모든 화면에 반복되는 그 바를 수치로 정의하고, 한 번 고치면 전부 바뀌는 컴포넌트로 만듭니다.
+실측표가 없으면 실습을 시작할 수 없습니다. 꼭 재서 오세요. 노트북 필수입니다.
+질문 있으신 분?
+[운영 메모]
+실측표가 2주차 수업의 재료다. 재보지 않고 오면 실습을 시작할 수 없다. '다른 그대로 적어 오라'는 말을 강조할 것 — 정리해서 오면 문제가 안 보인다.</a:t>
             </a:r>
             <a:endParaRPr lang="en-US" dirty="0"/>
           </a:p>
@@ -1132,7 +1180,12 @@
           <a:p>
             <a:r>
               <a:rPr lang="en-US" dirty="0"/>
-              <a:t>발표 시간표는 8명 기준이다. 인원이 다르면 첫 수업 전에 조정할 것 — 12명이면 6분 발표 + 5분 피드백. 피드백 7분을 길게 잡은 이유는 오늘이 학기 중 유일하게 전원의 프로젝트를 훑는 시간이기 때문이다.</a:t>
+              <a:t>[말할 내용]
+오늘 세 시간은 이렇게 씁니다.
+앞 20분 오리엔테이션, 그다음 발표입니다. 한 사람당 8분 발표에 7분 피드백. 중간에 10분 쉬고요. 발표가 끝나면 20분 총평, 마지막에 2주차 준비물을 안내합니다.
+피드백을 7분이나 잡은 이유는, 오늘이 학기 중에 전원의 프로젝트를 다 훑는 유일한 시간이기 때문입니다. 남의 발표를 흘려듣지 마세요.
+[운영 메모]
+발표 시간표는 8명 기준이다. 인원이 다르면 첫 수업 전에 조정할 것 — 12명이면 6분 발표 + 5분 피드백. 피드백 7분을 길게 잡은 이유는 오늘이 학기 중 유일하게 전원의 프로젝트를 훑는 시간이기 때문이다.</a:t>
             </a:r>
             <a:endParaRPr lang="en-US" dirty="0"/>
           </a:p>
@@ -1220,7 +1273,13 @@
           <a:p>
             <a:r>
               <a:rPr lang="en-US" dirty="0"/>
-              <a:t>1학기와 2학기가 하나의 프로젝트라는 인식을 오늘 세워야 한다. 새로 시작하는 기분으로 컨셉을 바꾸려는 학생이 반드시 나온다.</a:t>
+              <a:t>[말할 내용]
+오늘의 목표 네 가지입니다.
+자기 1학기 결과를 8분 안에 설명할 수 있을 것. 이번 학기에 만들 것을 목록으로 알 것. 동료 전원의 프로젝트를 한 번 볼 것. 그리고 15주 마감 세 개를 알 것.
+아래 문장이 이 학기의 정의입니다. 1학기에 정한 것을 눈에 보이는 결과로 만들어, 전시 패널 한 장으로 내놓는다.
+'정한 것'이라는 말이 중요합니다. 새로 정하는 학기가 아닙니다.
+[운영 메모]
+1학기와 2학기가 하나의 프로젝트라는 인식을 오늘 세워야 한다. 새로 시작하는 기분으로 컨셉을 바꾸려는 학생이 반드시 나온다.</a:t>
             </a:r>
             <a:endParaRPr lang="en-US" dirty="0"/>
           </a:p>
@@ -1308,7 +1367,15 @@
           <a:p>
             <a:r>
               <a:rPr lang="en-US" dirty="0"/>
-              <a:t>오른쪽을 다시 하려는 학생을 막는 표다. '1학기 결론을 흔들지 않는다'를 여기서 못 박는다.</a:t>
+              <a:t>[말할 내용]
+묻는 질문이 바뀝니다.
+1학기에는 '무엇을 왜 만들 것인가'를 물었습니다. 이번 학기는 '이것을 어떻게 보이게 할 것인가'입니다.
+결과물도 다릅니다. 리서치와 컨셉 문서에서, 완성된 화면과 디자인 시스템과 인쇄 데이터로 바뀝니다.
+판단 기준도 바뀝니다. 1학기는 타당성과 설득력, 논증의 문제였습니다. 이번 학기는 일관성·완성도·규격 준수입니다. 재현 가능한 기준이라는 뜻이에요. 잘했는지 아닌지가 눈으로 확인됩니다.
+그리고 끝나는 지점. 1학기는 뭘 만들지 정한 문서로 끝났고, 이번 학기는 출력소에 넘길 수 있는 파일로 끝납니다.
+오른쪽 열을 다시 하려는 분이 매년 나옵니다. 오늘 발표를 듣고 나면 특히 그렇습니다. 뒤에서 다시 말씀드리겠습니다.
+[운영 메모]
+오른쪽을 다시 하려는 학생을 막는 표다. '1학기 결론을 흔들지 않는다'를 여기서 못 박는다.</a:t>
             </a:r>
             <a:endParaRPr lang="en-US" dirty="0"/>
           </a:p>
@@ -1396,7 +1463,15 @@
           <a:p>
             <a:r>
               <a:rPr lang="en-US" dirty="0"/>
-              <a:t>구간 이름(기준·시스템·화면·패널)을 외우게 할 것. 매주 '지금 어느 구간인지'로 위치를 잡아 준다.</a:t>
+              <a:t>[말할 내용]
+15주를 네 구간으로 나눴습니다.
+1~2주는 기준입니다. 오늘 결과를 공유하고, 다음 주에 화면 기준 폭과 하단 GNB를 수치로 규격화합니다. 여기서 정한 값이 학기 내내 기준이 됩니다.
+3~6주는 시스템입니다. 반복되는 것을 먼저 만듭니다. 컬러·타이포·간격 토큰과 컴포넌트요. 여기가 부실하면 화면 작업이 세 배 느려집니다.
+7~11주는 화면입니다. 실제로 그립니다. 패널에 실릴 이미지가 이 구간에서 나옵니다.
+12~15주는 패널입니다. 화면을 완전히 다른 형식으로 재편집합니다.
+뒤로 갈수록 되돌릴 수 있는 폭이 줄어듭니다. 3주차 이후 세부 구성은 확정해서 공지하겠습니다.
+[운영 메모]
+구간 이름(기준·시스템·화면·패널)을 외우게 할 것. 매주 '지금 어느 구간인지'로 위치를 잡아 준다.</a:t>
             </a:r>
             <a:endParaRPr lang="en-US" dirty="0"/>
           </a:p>
@@ -1484,7 +1559,12 @@
           <a:p>
             <a:r>
               <a:rPr lang="en-US" dirty="0"/>
-              <a:t>타이머를 크게 띄운다. 오늘 발표는 평가하지 않는다고 시작 전에 명시할 것 — 그래야 비어 있는 부분을 솔직히 꺼낸다.</a:t>
+              <a:t>[말할 내용]
+이제 발표입니다. 한 사람 8분, 피드백 7분. 순서는 추첨으로 정하겠습니다.
+시작 전에 하나만. 오늘 발표는 평가하지 않습니다. 점수 매기는 자리가 아니라 각자 어디서 출발하는지 확인하는 자리입니다.
+그러니 잘된 것만 보여 주려 하지 마시고, 비어 있는 것도 그대로 꺼내 주세요.
+[운영 메모]
+타이머를 크게 띄운다. 오늘 발표는 평가하지 않는다고 시작 전에 명시할 것 — 그래야 비어 있는 부분을 솔직히 꺼낸다.</a:t>
             </a:r>
             <a:endParaRPr lang="en-US" dirty="0"/>
           </a:p>
@@ -1572,7 +1652,15 @@
           <a:p>
             <a:r>
               <a:rPr lang="en-US" dirty="0"/>
-              <a:t>학생 대부분이 완성된 것만 보여 주려 한다. 비어 있는 것을 말한 학생을 그 자리에서 칭찬하면 분위기가 바뀐다.</a:t>
+              <a:t>[말할 내용]
+이 순서로 말씀해 주세요.
+처음 1분은 무엇을 만드는 서비스인지 한 문장. 그다음 1분 반은 누구의 어떤 문제에서 출발했는지. 2분 반부터는 컨셉과 그걸 고른 이유입니다.
+4분부터 2분 반 동안 지금 있는 화면을 보여 주세요. 한 장씩 넘기지 마시고 전체를 펼쳐 놓고 한 번에 보여 주시면 됩니다. 그래야 '같은 서비스로 보이는지'가 드러납니다.
+그리고 마지막 90초. 비어 있는 것과 이번 학기에 만들 것.
+이 마지막 90초가 오늘 발표의 핵심입니다. 무엇이 없는지 말하지 않으면 이 발표는 의미가 없습니다.
+듣는 분들은 오른쪽 네 가지를 보시면 됩니다. 화면들이 같은 서비스로 보이는지, 빠진 단계가 있는지, 패널에 실릴 만한 장면이 이미 있는지, 작업량이 현실적인지.
+[운영 메모]
+학생 대부분이 완성된 것만 보여 주려 한다. 비어 있는 것을 말한 학생을 그 자리에서 칭찬하면 분위기가 바뀐다.</a:t>
             </a:r>
             <a:endParaRPr lang="en-US" dirty="0"/>
           </a:p>
@@ -1660,7 +1748,13 @@
           <a:p>
             <a:r>
               <a:rPr lang="en-US" dirty="0"/>
-              <a:t>기록지를 인쇄해 나눠 주면 피드백 7분의 침묵이 사라진다. 6~7번 때문에 남의 발표를 자기 일로 듣는다.</a:t>
+              <a:t>[말할 내용]
+기록지를 나눠 드렸습니다. 여덟 명분을 채우셔야 하고, 오늘 제출물 중 하나입니다.
+1번과 2번을 못 적으셨다면 — 이 사람이 만드는 서비스와 문제를 한 줄로 적을 수 없었다면 — 그 사실 자체를 발표자에게 피드백으로 주세요. 가장 중요한 정보입니다.
+그리고 6번, 7번을 꼭 채우세요. 그래야 남의 발표를 자기 일로 듣게 됩니다.
+특히 7번, 내가 뒤처진 부분을 솔직하게 적으세요. 오늘 알면 따라잡을 시간이 14주 남았습니다.
+[운영 메모]
+기록지를 인쇄해 나눠 주면 피드백 7분의 침묵이 사라진다. 6~7번 때문에 남의 발표를 자기 일로 듣는다.</a:t>
             </a:r>
             <a:endParaRPr lang="en-US" dirty="0"/>
           </a:p>
@@ -1748,7 +1842,13 @@
           <a:p>
             <a:r>
               <a:rPr lang="en-US" dirty="0"/>
-              <a:t>총평 첫 슬라이드. 발표 직후 학생들이 가장 흔들려 있을 때 이 말을 들어야 한다.</a:t>
+              <a:t>[말할 내용]
+발표 다 들으셨습니다. 지금 대부분 자기 컨셉이 약해 보이실 겁니다. 매년 그렇습니다.
+그런데 여기서 컨셉을 바꾸면 리서치 근거가 사라진 채로 화면만 남습니다. 그러면 패널 앞에서 '왜 이걸 만들었는지'에 답할 수 없게 됩니다.
+컨셉의 범위를 좁히는 건 됩니다. 출발점을 갈아엎는 건 이번 학기에 불가능합니다.
+1학기 결론은 흔들지 않습니다. 이번 학기에 바꿀 것은 '어떻게 보이는가'입니다.
+[운영 메모]
+총평 첫 슬라이드. 발표 직후 학생들이 가장 흔들려 있을 때 이 말을 들어야 한다.</a:t>
             </a:r>
             <a:endParaRPr lang="en-US" dirty="0"/>
           </a:p>
